--- a/docs/poster/pptx/UG_ICT_P01_pitch.pptx
+++ b/docs/poster/pptx/UG_ICT_P01_pitch.pptx
@@ -935,7 +935,7 @@
         </p:blipFill>
         <p:spPr>
           <a:xfrm>
-            <a:off x="495300" y="361950"/>
+            <a:off x="495300" y="323850"/>
             <a:ext cx="823913" cy="285750"/>
           </a:xfrm>
           <a:prstGeom prst="rect">
@@ -951,7 +951,7 @@
         </p:nvSpPr>
         <p:spPr>
           <a:xfrm>
-            <a:off x="1390650" y="381000"/>
+            <a:off x="1390650" y="342900"/>
             <a:ext cx="152400" cy="247650"/>
           </a:xfrm>
           <a:prstGeom prst="rect">
@@ -998,7 +998,7 @@
         </p:blipFill>
         <p:spPr>
           <a:xfrm>
-            <a:off x="1581150" y="390525"/>
+            <a:off x="1581150" y="352425"/>
             <a:ext cx="510540" cy="228600"/>
           </a:xfrm>
           <a:prstGeom prst="rect">
@@ -1014,8 +1014,8 @@
         </p:nvSpPr>
         <p:spPr>
           <a:xfrm>
-            <a:off x="476250" y="762000"/>
-            <a:ext cx="6343650" cy="571500"/>
+            <a:off x="476250" y="685800"/>
+            <a:ext cx="6343650" cy="533400"/>
           </a:xfrm>
           <a:prstGeom prst="rect">
             <a:avLst/>
@@ -1031,7 +1031,7 @@
               <a:buNone/>
             </a:pPr>
             <a:r>
-              <a:rPr lang="en-US" sz="4200" b="1" spc="-100" kern="0" dirty="0">
+              <a:rPr lang="en-US" sz="4000" b="1" spc="-100" kern="0" dirty="0">
                 <a:solidFill>
                   <a:srgbClr val="262626"/>
                 </a:solidFill>
@@ -1045,7 +1045,7 @@
               <a:buNone/>
             </a:pPr>
             <a:r>
-              <a:rPr lang="en-US" sz="4200" b="1" spc="-100" kern="0" dirty="0">
+              <a:rPr lang="en-US" sz="4000" b="1" spc="-100" kern="0" dirty="0">
                 <a:solidFill>
                   <a:srgbClr val="009CA6"/>
                 </a:solidFill>
@@ -1055,7 +1055,7 @@
               </a:rPr>
               <a:t>Inventory</a:t>
             </a:r>
-            <a:endParaRPr lang="en-US" sz="4200" dirty="0"/>
+            <a:endParaRPr lang="en-US" sz="4000" dirty="0"/>
           </a:p>
         </p:txBody>
       </p:sp>
@@ -1067,8 +1067,8 @@
         </p:nvSpPr>
         <p:spPr>
           <a:xfrm>
-            <a:off x="495300" y="1390650"/>
-            <a:ext cx="6343650" cy="552450"/>
+            <a:off x="495300" y="1257300"/>
+            <a:ext cx="6343650" cy="476250"/>
           </a:xfrm>
           <a:prstGeom prst="rect">
             <a:avLst/>
@@ -1084,7 +1084,7 @@
               <a:buNone/>
             </a:pPr>
             <a:r>
-              <a:rPr lang="en-US" sz="1600" b="1" dirty="0">
+              <a:rPr lang="en-US" sz="1500" b="1" dirty="0">
                 <a:solidFill>
                   <a:srgbClr val="7B57CB"/>
                 </a:solidFill>
@@ -1094,7 +1094,7 @@
               </a:rPr>
               <a:t>Stop asking "who has the projector?" Know where every school asset is, who has it, and when it's due back.</a:t>
             </a:r>
-            <a:endParaRPr lang="en-US" sz="1600" dirty="0"/>
+            <a:endParaRPr lang="en-US" sz="1500" dirty="0"/>
           </a:p>
         </p:txBody>
       </p:sp>
@@ -1106,12 +1106,12 @@
         </p:nvSpPr>
         <p:spPr>
           <a:xfrm>
-            <a:off x="495300" y="2095500"/>
-            <a:ext cx="6343650" cy="762000"/>
+            <a:off x="495300" y="1847850"/>
+            <a:ext cx="6343650" cy="666750"/>
           </a:xfrm>
           <a:prstGeom prst="roundRect">
             <a:avLst>
-              <a:gd name="adj" fmla="val 12500"/>
+              <a:gd name="adj" fmla="val 14286"/>
             </a:avLst>
           </a:prstGeom>
           <a:solidFill>
@@ -1133,12 +1133,12 @@
         </p:nvSpPr>
         <p:spPr>
           <a:xfrm>
-            <a:off x="495300" y="2095500"/>
-            <a:ext cx="1428750" cy="762000"/>
+            <a:off x="495300" y="1847850"/>
+            <a:ext cx="1428750" cy="666750"/>
           </a:xfrm>
           <a:prstGeom prst="roundRect">
             <a:avLst>
-              <a:gd name="adj" fmla="val 12500"/>
+              <a:gd name="adj" fmla="val 14286"/>
             </a:avLst>
           </a:prstGeom>
           <a:solidFill>
@@ -1160,8 +1160,8 @@
         </p:nvSpPr>
         <p:spPr>
           <a:xfrm>
-            <a:off x="1809750" y="2095500"/>
-            <a:ext cx="114300" cy="762000"/>
+            <a:off x="1809750" y="1847850"/>
+            <a:ext cx="114300" cy="666750"/>
           </a:xfrm>
           <a:prstGeom prst="rect">
             <a:avLst/>
@@ -1185,8 +1185,8 @@
         </p:nvSpPr>
         <p:spPr>
           <a:xfrm>
-            <a:off x="628650" y="2095500"/>
-            <a:ext cx="1238250" cy="762000"/>
+            <a:off x="628650" y="1847850"/>
+            <a:ext cx="1238250" cy="666750"/>
           </a:xfrm>
           <a:prstGeom prst="rect">
             <a:avLst/>
@@ -1224,8 +1224,8 @@
         </p:nvSpPr>
         <p:spPr>
           <a:xfrm>
-            <a:off x="2057400" y="2095500"/>
-            <a:ext cx="4667250" cy="762000"/>
+            <a:off x="2057400" y="1847850"/>
+            <a:ext cx="4667250" cy="666750"/>
           </a:xfrm>
           <a:prstGeom prst="rect">
             <a:avLst/>
@@ -1252,7 +1252,7 @@
                 <a:ea typeface="Arial" pitchFamily="34" charset="-122"/>
                 <a:cs typeface="Arial" pitchFamily="34" charset="-120"/>
               </a:rPr>
-              <a:t>Schools track thousands of laptops, lab kits and instruments with spreadsheets, paper sign-out sheets and memory, so items go missing and stock expires unnoticed.</a:t>
+              <a:t>Schools track laptops, lab kits and instruments with spreadsheets, paper and memory, so items go missing and stock expires unnoticed.</a:t>
             </a:r>
             <a:endParaRPr lang="en-US" sz="1200" dirty="0"/>
           </a:p>
@@ -1266,12 +1266,12 @@
         </p:nvSpPr>
         <p:spPr>
           <a:xfrm>
-            <a:off x="495300" y="2962275"/>
-            <a:ext cx="6343650" cy="762000"/>
+            <a:off x="495300" y="2609850"/>
+            <a:ext cx="6343650" cy="666750"/>
           </a:xfrm>
           <a:prstGeom prst="roundRect">
             <a:avLst>
-              <a:gd name="adj" fmla="val 12500"/>
+              <a:gd name="adj" fmla="val 14286"/>
             </a:avLst>
           </a:prstGeom>
           <a:solidFill>
@@ -1293,12 +1293,12 @@
         </p:nvSpPr>
         <p:spPr>
           <a:xfrm>
-            <a:off x="495300" y="2962275"/>
-            <a:ext cx="1428750" cy="762000"/>
+            <a:off x="495300" y="2609850"/>
+            <a:ext cx="1428750" cy="666750"/>
           </a:xfrm>
           <a:prstGeom prst="roundRect">
             <a:avLst>
-              <a:gd name="adj" fmla="val 12500"/>
+              <a:gd name="adj" fmla="val 14286"/>
             </a:avLst>
           </a:prstGeom>
           <a:solidFill>
@@ -1320,8 +1320,8 @@
         </p:nvSpPr>
         <p:spPr>
           <a:xfrm>
-            <a:off x="1809750" y="2962275"/>
-            <a:ext cx="114300" cy="762000"/>
+            <a:off x="1809750" y="2609850"/>
+            <a:ext cx="114300" cy="666750"/>
           </a:xfrm>
           <a:prstGeom prst="rect">
             <a:avLst/>
@@ -1345,8 +1345,8 @@
         </p:nvSpPr>
         <p:spPr>
           <a:xfrm>
-            <a:off x="628650" y="2962275"/>
-            <a:ext cx="1238250" cy="762000"/>
+            <a:off x="628650" y="2609850"/>
+            <a:ext cx="1238250" cy="666750"/>
           </a:xfrm>
           <a:prstGeom prst="rect">
             <a:avLst/>
@@ -1384,8 +1384,8 @@
         </p:nvSpPr>
         <p:spPr>
           <a:xfrm>
-            <a:off x="2057400" y="2962275"/>
-            <a:ext cx="4667250" cy="762000"/>
+            <a:off x="2057400" y="2609850"/>
+            <a:ext cx="4667250" cy="666750"/>
           </a:xfrm>
           <a:prstGeom prst="rect">
             <a:avLst/>
@@ -1412,7 +1412,7 @@
                 <a:ea typeface="Arial" pitchFamily="34" charset="-122"/>
                 <a:cs typeface="Arial" pitchFamily="34" charset="-120"/>
               </a:rPr>
-              <a:t>An inventory back end for Civica's Daymap platform: items and individual units, loans and returns, custom fields, tags, expiry tracking and search.</a:t>
+              <a:t>An inventory system for Civica's Daymap platform: every item and unit, loans and returns, custom fields, tags, expiry alerts and search.</a:t>
             </a:r>
             <a:endParaRPr lang="en-US" sz="1200" dirty="0"/>
           </a:p>
@@ -1426,39 +1426,12 @@
         </p:nvSpPr>
         <p:spPr>
           <a:xfrm>
-            <a:off x="495300" y="3819525"/>
-            <a:ext cx="6343650" cy="647700"/>
+            <a:off x="495300" y="3371850"/>
+            <a:ext cx="6343650" cy="1524000"/>
           </a:xfrm>
           <a:prstGeom prst="roundRect">
             <a:avLst>
-              <a:gd name="adj" fmla="val 14706"/>
-            </a:avLst>
-          </a:prstGeom>
-          <a:solidFill>
-            <a:srgbClr val="F2F4F5"/>
-          </a:solidFill>
-          <a:ln w="12700">
-            <a:solidFill>
-              <a:srgbClr val="F2F4F5"/>
-            </a:solidFill>
-            <a:prstDash val="solid"/>
-          </a:ln>
-        </p:spPr>
-      </p:sp>
-      <p:sp>
-        <p:nvSpPr>
-          <p:cNvPr id="20" name="Shape 16"/>
-          <p:cNvSpPr/>
-          <p:nvPr/>
-        </p:nvSpPr>
-        <p:spPr>
-          <a:xfrm>
-            <a:off x="495300" y="3819525"/>
-            <a:ext cx="1428750" cy="647700"/>
-          </a:xfrm>
-          <a:prstGeom prst="roundRect">
-            <a:avLst>
-              <a:gd name="adj" fmla="val 14706"/>
+              <a:gd name="adj" fmla="val 6250"/>
             </a:avLst>
           </a:prstGeom>
           <a:solidFill>
@@ -1474,39 +1447,14 @@
       </p:sp>
       <p:sp>
         <p:nvSpPr>
-          <p:cNvPr id="21" name="Shape 17"/>
-          <p:cNvSpPr/>
-          <p:nvPr/>
-        </p:nvSpPr>
-        <p:spPr>
-          <a:xfrm>
-            <a:off x="1809750" y="3819525"/>
-            <a:ext cx="114300" cy="647700"/>
-          </a:xfrm>
-          <a:prstGeom prst="rect">
-            <a:avLst/>
-          </a:prstGeom>
-          <a:solidFill>
-            <a:srgbClr val="7B57CB"/>
-          </a:solidFill>
-          <a:ln w="12700">
-            <a:solidFill>
-              <a:srgbClr val="7B57CB"/>
-            </a:solidFill>
-            <a:prstDash val="solid"/>
-          </a:ln>
-        </p:spPr>
-      </p:sp>
-      <p:sp>
-        <p:nvSpPr>
-          <p:cNvPr id="22" name="WHY IT MATTERS"/>
+          <p:cNvPr id="20" name="Benefits heading"/>
           <p:cNvSpPr txBox="1"/>
           <p:nvPr/>
         </p:nvSpPr>
         <p:spPr>
           <a:xfrm>
-            <a:off x="628650" y="3819525"/>
-            <a:ext cx="1238250" cy="647700"/>
+            <a:off x="628650" y="3448050"/>
+            <a:ext cx="3810000" cy="247650"/>
           </a:xfrm>
           <a:prstGeom prst="rect">
             <a:avLst/>
@@ -1522,7 +1470,7 @@
               <a:buNone/>
             </a:pPr>
             <a:r>
-              <a:rPr lang="en-US" sz="1150" b="1" spc="100" kern="0" dirty="0">
+              <a:rPr lang="en-US" sz="1300" b="1" spc="100" kern="0" dirty="0">
                 <a:solidFill>
                   <a:srgbClr val="FFFFFF"/>
                 </a:solidFill>
@@ -1530,22 +1478,46 @@
                 <a:ea typeface="Arial" pitchFamily="34" charset="-122"/>
                 <a:cs typeface="Arial" pitchFamily="34" charset="-120"/>
               </a:rPr>
-              <a:t>WHY IT MATTERS</a:t>
-            </a:r>
-            <a:endParaRPr lang="en-US" sz="1150" dirty="0"/>
-          </a:p>
-        </p:txBody>
-      </p:sp>
-      <p:sp>
-        <p:nvSpPr>
-          <p:cNvPr id="23" name="Text 19"/>
+              <a:t>WHAT SCHOOLS GAIN</a:t>
+            </a:r>
+            <a:endParaRPr lang="en-US" sz="1300" dirty="0"/>
+          </a:p>
+        </p:txBody>
+      </p:sp>
+      <p:sp>
+        <p:nvSpPr>
+          <p:cNvPr id="21" name="Shape 17"/>
+          <p:cNvSpPr/>
+          <p:nvPr/>
+        </p:nvSpPr>
+        <p:spPr>
+          <a:xfrm>
+            <a:off x="628650" y="3752850"/>
+            <a:ext cx="1962150" cy="1028700"/>
+          </a:xfrm>
+          <a:prstGeom prst="roundRect">
+            <a:avLst>
+              <a:gd name="adj" fmla="val 7407"/>
+            </a:avLst>
+          </a:prstGeom>
+          <a:solidFill>
+            <a:srgbClr val="FFFFFF">
+              <a:alpha val="15000"/>
+            </a:srgbClr>
+          </a:solidFill>
+          <a:ln/>
+        </p:spPr>
+      </p:sp>
+      <p:sp>
+        <p:nvSpPr>
+          <p:cNvPr id="22" name="Benefit: Save staff time"/>
           <p:cNvSpPr txBox="1"/>
           <p:nvPr/>
         </p:nvSpPr>
         <p:spPr>
           <a:xfrm>
-            <a:off x="2057400" y="3819525"/>
-            <a:ext cx="4667250" cy="647700"/>
+            <a:off x="723900" y="3829050"/>
+            <a:ext cx="1771650" cy="895350"/>
           </a:xfrm>
           <a:prstGeom prst="rect">
             <a:avLst/>
@@ -1554,44 +1526,254 @@
           <a:ln/>
         </p:spPr>
         <p:txBody>
-          <a:bodyPr wrap="square" lIns="0" tIns="0" rIns="0" bIns="0" rtlCol="0" anchor="ctr"/>
+          <a:bodyPr wrap="square" lIns="0" tIns="0" rIns="0" bIns="0" rtlCol="0" anchor="t"/>
           <a:lstStyle/>
           <a:p>
             <a:pPr indent="0" marL="0">
               <a:lnSpc>
-                <a:spcPct val="105000"/>
+                <a:spcPct val="110000"/>
               </a:lnSpc>
+              <a:spcAft>
+                <a:spcPts val="400"/>
+              </a:spcAft>
               <a:buNone/>
             </a:pPr>
             <a:r>
-              <a:rPr lang="en-US" sz="1200" dirty="0">
+              <a:rPr lang="en-US" sz="1350" b="1" dirty="0">
                 <a:solidFill>
-                  <a:srgbClr val="262626"/>
+                  <a:srgbClr val="FFFFFF"/>
                 </a:solidFill>
                 <a:latin typeface="Arial" pitchFamily="34" charset="0"/>
                 <a:ea typeface="Arial" pitchFamily="34" charset="-122"/>
                 <a:cs typeface="Arial" pitchFamily="34" charset="-120"/>
               </a:rPr>
-              <a:t>Less time chasing equipment, fewer lost and expired items, and one trusted record of everything a school owns.</a:t>
-            </a:r>
-            <a:endParaRPr lang="en-US" sz="1200" dirty="0"/>
-          </a:p>
-        </p:txBody>
-      </p:sp>
-      <p:sp>
-        <p:nvSpPr>
-          <p:cNvPr id="24" name="Shape 20"/>
+              <a:t>Save staff time</a:t>
+            </a:r>
+            <a:endParaRPr lang="en-US" sz="1350" dirty="0"/>
+          </a:p>
+          <a:p>
+            <a:pPr indent="0" marL="0">
+              <a:lnSpc>
+                <a:spcPct val="110000"/>
+              </a:lnSpc>
+              <a:spcAft>
+                <a:spcPts val="400"/>
+              </a:spcAft>
+              <a:buNone/>
+            </a:pPr>
+            <a:r>
+              <a:rPr lang="en-US" sz="1150" dirty="0">
+                <a:solidFill>
+                  <a:srgbClr val="FFFFFF"/>
+                </a:solidFill>
+                <a:latin typeface="Arial" pitchFamily="34" charset="0"/>
+                <a:ea typeface="Arial" pitchFamily="34" charset="-122"/>
+                <a:cs typeface="Arial" pitchFamily="34" charset="-120"/>
+              </a:rPr>
+              <a:t>See who has any item and when it's due back.</a:t>
+            </a:r>
+            <a:endParaRPr lang="en-US" sz="1350" dirty="0"/>
+          </a:p>
+        </p:txBody>
+      </p:sp>
+      <p:sp>
+        <p:nvSpPr>
+          <p:cNvPr id="23" name="Shape 19"/>
           <p:cNvSpPr/>
           <p:nvPr/>
         </p:nvSpPr>
         <p:spPr>
           <a:xfrm>
-            <a:off x="495300" y="4600575"/>
-            <a:ext cx="2051050" cy="1371600"/>
+            <a:off x="2686050" y="3752850"/>
+            <a:ext cx="1962150" cy="1028700"/>
           </a:xfrm>
           <a:prstGeom prst="roundRect">
             <a:avLst>
-              <a:gd name="adj" fmla="val 6944"/>
+              <a:gd name="adj" fmla="val 7407"/>
+            </a:avLst>
+          </a:prstGeom>
+          <a:solidFill>
+            <a:srgbClr val="FFFFFF">
+              <a:alpha val="15000"/>
+            </a:srgbClr>
+          </a:solidFill>
+          <a:ln/>
+        </p:spPr>
+      </p:sp>
+      <p:sp>
+        <p:nvSpPr>
+          <p:cNvPr id="24" name="Benefit: Fewer losses"/>
+          <p:cNvSpPr txBox="1"/>
+          <p:nvPr/>
+        </p:nvSpPr>
+        <p:spPr>
+          <a:xfrm>
+            <a:off x="2781300" y="3829050"/>
+            <a:ext cx="1771650" cy="895350"/>
+          </a:xfrm>
+          <a:prstGeom prst="rect">
+            <a:avLst/>
+          </a:prstGeom>
+          <a:noFill/>
+          <a:ln/>
+        </p:spPr>
+        <p:txBody>
+          <a:bodyPr wrap="square" lIns="0" tIns="0" rIns="0" bIns="0" rtlCol="0" anchor="t"/>
+          <a:lstStyle/>
+          <a:p>
+            <a:pPr indent="0" marL="0">
+              <a:lnSpc>
+                <a:spcPct val="110000"/>
+              </a:lnSpc>
+              <a:spcAft>
+                <a:spcPts val="400"/>
+              </a:spcAft>
+              <a:buNone/>
+            </a:pPr>
+            <a:r>
+              <a:rPr lang="en-US" sz="1350" b="1" dirty="0">
+                <a:solidFill>
+                  <a:srgbClr val="FFFFFF"/>
+                </a:solidFill>
+                <a:latin typeface="Arial" pitchFamily="34" charset="0"/>
+                <a:ea typeface="Arial" pitchFamily="34" charset="-122"/>
+                <a:cs typeface="Arial" pitchFamily="34" charset="-120"/>
+              </a:rPr>
+              <a:t>Fewer losses</a:t>
+            </a:r>
+            <a:endParaRPr lang="en-US" sz="1350" dirty="0"/>
+          </a:p>
+          <a:p>
+            <a:pPr indent="0" marL="0">
+              <a:lnSpc>
+                <a:spcPct val="110000"/>
+              </a:lnSpc>
+              <a:spcAft>
+                <a:spcPts val="400"/>
+              </a:spcAft>
+              <a:buNone/>
+            </a:pPr>
+            <a:r>
+              <a:rPr lang="en-US" sz="1150" dirty="0">
+                <a:solidFill>
+                  <a:srgbClr val="FFFFFF"/>
+                </a:solidFill>
+                <a:latin typeface="Arial" pitchFamily="34" charset="0"/>
+                <a:ea typeface="Arial" pitchFamily="34" charset="-122"/>
+                <a:cs typeface="Arial" pitchFamily="34" charset="-120"/>
+              </a:rPr>
+              <a:t>Overdue loans and expiring stock are flagged early.</a:t>
+            </a:r>
+            <a:endParaRPr lang="en-US" sz="1350" dirty="0"/>
+          </a:p>
+        </p:txBody>
+      </p:sp>
+      <p:sp>
+        <p:nvSpPr>
+          <p:cNvPr id="25" name="Shape 21"/>
+          <p:cNvSpPr/>
+          <p:nvPr/>
+        </p:nvSpPr>
+        <p:spPr>
+          <a:xfrm>
+            <a:off x="4743450" y="3752850"/>
+            <a:ext cx="1962150" cy="1028700"/>
+          </a:xfrm>
+          <a:prstGeom prst="roundRect">
+            <a:avLst>
+              <a:gd name="adj" fmla="val 7407"/>
+            </a:avLst>
+          </a:prstGeom>
+          <a:solidFill>
+            <a:srgbClr val="FFFFFF">
+              <a:alpha val="15000"/>
+            </a:srgbClr>
+          </a:solidFill>
+          <a:ln/>
+        </p:spPr>
+      </p:sp>
+      <p:sp>
+        <p:nvSpPr>
+          <p:cNvPr id="26" name="Benefit: One trusted record"/>
+          <p:cNvSpPr txBox="1"/>
+          <p:nvPr/>
+        </p:nvSpPr>
+        <p:spPr>
+          <a:xfrm>
+            <a:off x="4838700" y="3829050"/>
+            <a:ext cx="1771650" cy="895350"/>
+          </a:xfrm>
+          <a:prstGeom prst="rect">
+            <a:avLst/>
+          </a:prstGeom>
+          <a:noFill/>
+          <a:ln/>
+        </p:spPr>
+        <p:txBody>
+          <a:bodyPr wrap="square" lIns="0" tIns="0" rIns="0" bIns="0" rtlCol="0" anchor="t"/>
+          <a:lstStyle/>
+          <a:p>
+            <a:pPr indent="0" marL="0">
+              <a:lnSpc>
+                <a:spcPct val="110000"/>
+              </a:lnSpc>
+              <a:spcAft>
+                <a:spcPts val="400"/>
+              </a:spcAft>
+              <a:buNone/>
+            </a:pPr>
+            <a:r>
+              <a:rPr lang="en-US" sz="1350" b="1" dirty="0">
+                <a:solidFill>
+                  <a:srgbClr val="FFFFFF"/>
+                </a:solidFill>
+                <a:latin typeface="Arial" pitchFamily="34" charset="0"/>
+                <a:ea typeface="Arial" pitchFamily="34" charset="-122"/>
+                <a:cs typeface="Arial" pitchFamily="34" charset="-120"/>
+              </a:rPr>
+              <a:t>One trusted record</a:t>
+            </a:r>
+            <a:endParaRPr lang="en-US" sz="1350" dirty="0"/>
+          </a:p>
+          <a:p>
+            <a:pPr indent="0" marL="0">
+              <a:lnSpc>
+                <a:spcPct val="110000"/>
+              </a:lnSpc>
+              <a:spcAft>
+                <a:spcPts val="400"/>
+              </a:spcAft>
+              <a:buNone/>
+            </a:pPr>
+            <a:r>
+              <a:rPr lang="en-US" sz="1150" dirty="0">
+                <a:solidFill>
+                  <a:srgbClr val="FFFFFF"/>
+                </a:solidFill>
+                <a:latin typeface="Arial" pitchFamily="34" charset="0"/>
+                <a:ea typeface="Arial" pitchFamily="34" charset="-122"/>
+                <a:cs typeface="Arial" pitchFamily="34" charset="-120"/>
+              </a:rPr>
+              <a:t>Every item on every campus, set up the way each school works.</a:t>
+            </a:r>
+            <a:endParaRPr lang="en-US" sz="1350" dirty="0"/>
+          </a:p>
+        </p:txBody>
+      </p:sp>
+      <p:sp>
+        <p:nvSpPr>
+          <p:cNvPr id="27" name="Shape 23"/>
+          <p:cNvSpPr/>
+          <p:nvPr/>
+        </p:nvSpPr>
+        <p:spPr>
+          <a:xfrm>
+            <a:off x="495300" y="5010150"/>
+            <a:ext cx="2051050" cy="990600"/>
+          </a:xfrm>
+          <a:prstGeom prst="roundRect">
+            <a:avLst>
+              <a:gd name="adj" fmla="val 9615"/>
             </a:avLst>
           </a:prstGeom>
           <a:solidFill>
@@ -1607,14 +1789,14 @@
       </p:sp>
       <p:sp>
         <p:nvSpPr>
-          <p:cNvPr id="25" name="Highlight 40"/>
+          <p:cNvPr id="28" name="Highlight 40"/>
           <p:cNvSpPr txBox="1"/>
           <p:nvPr/>
         </p:nvSpPr>
         <p:spPr>
           <a:xfrm>
-            <a:off x="628650" y="4714875"/>
-            <a:ext cx="1784350" cy="1181100"/>
+            <a:off x="628650" y="5105400"/>
+            <a:ext cx="1784350" cy="819150"/>
           </a:xfrm>
           <a:prstGeom prst="rect">
             <a:avLst/>
@@ -1653,7 +1835,7 @@
               <a:buNone/>
             </a:pPr>
             <a:r>
-              <a:rPr lang="en-US" sz="1100" dirty="0">
+              <a:rPr lang="en-US" sz="1150" dirty="0">
                 <a:solidFill>
                   <a:srgbClr val="DDDDDD"/>
                 </a:solidFill>
@@ -1661,7 +1843,7 @@
                 <a:ea typeface="Arial" pitchFamily="34" charset="-122"/>
                 <a:cs typeface="Arial" pitchFamily="34" charset="-120"/>
               </a:rPr>
-              <a:t>REST endpoints covering the full item lifecycle</a:t>
+              <a:t>REST endpoints across the full item lifecycle</a:t>
             </a:r>
             <a:endParaRPr lang="en-US" sz="2200" dirty="0"/>
           </a:p>
@@ -1669,18 +1851,18 @@
       </p:sp>
       <p:sp>
         <p:nvSpPr>
-          <p:cNvPr id="26" name="Shape 22"/>
+          <p:cNvPr id="29" name="Shape 25"/>
           <p:cNvSpPr/>
           <p:nvPr/>
         </p:nvSpPr>
         <p:spPr>
           <a:xfrm>
-            <a:off x="2641600" y="4600575"/>
-            <a:ext cx="2051050" cy="1371600"/>
+            <a:off x="2641600" y="5010150"/>
+            <a:ext cx="2051050" cy="990600"/>
           </a:xfrm>
           <a:prstGeom prst="roundRect">
             <a:avLst>
-              <a:gd name="adj" fmla="val 6944"/>
+              <a:gd name="adj" fmla="val 9615"/>
             </a:avLst>
           </a:prstGeom>
           <a:solidFill>
@@ -1696,14 +1878,14 @@
       </p:sp>
       <p:sp>
         <p:nvSpPr>
-          <p:cNvPr id="27" name="Highlight 105"/>
+          <p:cNvPr id="30" name="Highlight 105"/>
           <p:cNvSpPr txBox="1"/>
           <p:nvPr/>
         </p:nvSpPr>
         <p:spPr>
           <a:xfrm>
-            <a:off x="2774950" y="4714875"/>
-            <a:ext cx="1784350" cy="1181100"/>
+            <a:off x="2774950" y="5105400"/>
+            <a:ext cx="1784350" cy="819150"/>
           </a:xfrm>
           <a:prstGeom prst="rect">
             <a:avLst/>
@@ -1742,7 +1924,7 @@
               <a:buNone/>
             </a:pPr>
             <a:r>
-              <a:rPr lang="en-US" sz="1100" dirty="0">
+              <a:rPr lang="en-US" sz="1150" dirty="0">
                 <a:solidFill>
                   <a:srgbClr val="DDDDDD"/>
                 </a:solidFill>
@@ -1750,7 +1932,7 @@
                 <a:ea typeface="Arial" pitchFamily="34" charset="-122"/>
                 <a:cs typeface="Arial" pitchFamily="34" charset="-120"/>
               </a:rPr>
-              <a:t>passing unit tests across controllers and repositories</a:t>
+              <a:t>passing unit tests</a:t>
             </a:r>
             <a:endParaRPr lang="en-US" sz="2200" dirty="0"/>
           </a:p>
@@ -1758,18 +1940,18 @@
       </p:sp>
       <p:sp>
         <p:nvSpPr>
-          <p:cNvPr id="28" name="Shape 24"/>
+          <p:cNvPr id="31" name="Shape 27"/>
           <p:cNvSpPr/>
           <p:nvPr/>
         </p:nvSpPr>
         <p:spPr>
           <a:xfrm>
-            <a:off x="4787900" y="4600575"/>
-            <a:ext cx="2051050" cy="1371600"/>
+            <a:off x="4787900" y="5010150"/>
+            <a:ext cx="2051050" cy="990600"/>
           </a:xfrm>
           <a:prstGeom prst="roundRect">
             <a:avLst>
-              <a:gd name="adj" fmla="val 6944"/>
+              <a:gd name="adj" fmla="val 9615"/>
             </a:avLst>
           </a:prstGeom>
           <a:solidFill>
@@ -1785,14 +1967,14 @@
       </p:sp>
       <p:sp>
         <p:nvSpPr>
-          <p:cNvPr id="29" name="Highlight Any item"/>
+          <p:cNvPr id="32" name="Highlight Any item"/>
           <p:cNvSpPr txBox="1"/>
           <p:nvPr/>
         </p:nvSpPr>
         <p:spPr>
           <a:xfrm>
-            <a:off x="4921250" y="4714875"/>
-            <a:ext cx="1784350" cy="1181100"/>
+            <a:off x="4921250" y="5105400"/>
+            <a:ext cx="1784350" cy="819150"/>
           </a:xfrm>
           <a:prstGeom prst="rect">
             <a:avLst/>
@@ -1831,7 +2013,7 @@
               <a:buNone/>
             </a:pPr>
             <a:r>
-              <a:rPr lang="en-US" sz="1100" dirty="0">
+              <a:rPr lang="en-US" sz="1150" dirty="0">
                 <a:solidFill>
                   <a:srgbClr val="DDDDDD"/>
                 </a:solidFill>
@@ -1839,7 +2021,7 @@
                 <a:ea typeface="Arial" pitchFamily="34" charset="-122"/>
                 <a:cs typeface="Arial" pitchFamily="34" charset="-120"/>
               </a:rPr>
-              <a:t>custom fields let a violin and an iPad each store what matters</a:t>
+              <a:t>custom fields fit a violin or an iPad</a:t>
             </a:r>
             <a:endParaRPr lang="en-US" sz="2200" dirty="0"/>
           </a:p>
@@ -1847,14 +2029,14 @@
       </p:sp>
       <p:sp>
         <p:nvSpPr>
-          <p:cNvPr id="30" name="Shape 26"/>
+          <p:cNvPr id="33" name="Shape 29"/>
           <p:cNvSpPr/>
           <p:nvPr/>
         </p:nvSpPr>
         <p:spPr>
           <a:xfrm>
-            <a:off x="7219950" y="381000"/>
-            <a:ext cx="4476750" cy="4476750"/>
+            <a:off x="7219950" y="323850"/>
+            <a:ext cx="4476750" cy="4572000"/>
           </a:xfrm>
           <a:prstGeom prst="roundRect">
             <a:avLst>
@@ -1881,13 +2063,13 @@
       </p:sp>
       <p:sp>
         <p:nvSpPr>
-          <p:cNvPr id="31" name="Shape 27"/>
+          <p:cNvPr id="34" name="Shape 30"/>
           <p:cNvSpPr/>
           <p:nvPr/>
         </p:nvSpPr>
         <p:spPr>
           <a:xfrm>
-            <a:off x="7219950" y="381000"/>
+            <a:off x="7219950" y="323850"/>
             <a:ext cx="4476750" cy="247650"/>
           </a:xfrm>
           <a:prstGeom prst="roundRect">
@@ -1908,13 +2090,13 @@
       </p:sp>
       <p:sp>
         <p:nvSpPr>
-          <p:cNvPr id="32" name="Shape 28"/>
+          <p:cNvPr id="35" name="Shape 31"/>
           <p:cNvSpPr/>
           <p:nvPr/>
         </p:nvSpPr>
         <p:spPr>
           <a:xfrm>
-            <a:off x="7219950" y="533400"/>
+            <a:off x="7219950" y="476250"/>
             <a:ext cx="4476750" cy="95250"/>
           </a:xfrm>
           <a:prstGeom prst="rect">
@@ -1933,13 +2115,13 @@
       </p:sp>
       <p:sp>
         <p:nvSpPr>
-          <p:cNvPr id="33" name="Shape 29"/>
+          <p:cNvPr id="36" name="Shape 32"/>
           <p:cNvSpPr/>
           <p:nvPr/>
         </p:nvSpPr>
         <p:spPr>
           <a:xfrm>
-            <a:off x="7315200" y="457200"/>
+            <a:off x="7315200" y="400050"/>
             <a:ext cx="95250" cy="95250"/>
           </a:xfrm>
           <a:prstGeom prst="ellipse">
@@ -1953,13 +2135,13 @@
       </p:sp>
       <p:sp>
         <p:nvSpPr>
-          <p:cNvPr id="34" name="Shape 30"/>
+          <p:cNvPr id="37" name="Shape 33"/>
           <p:cNvSpPr/>
           <p:nvPr/>
         </p:nvSpPr>
         <p:spPr>
           <a:xfrm>
-            <a:off x="7467600" y="457200"/>
+            <a:off x="7467600" y="400050"/>
             <a:ext cx="95250" cy="95250"/>
           </a:xfrm>
           <a:prstGeom prst="ellipse">
@@ -1973,13 +2155,13 @@
       </p:sp>
       <p:sp>
         <p:nvSpPr>
-          <p:cNvPr id="35" name="Shape 31"/>
+          <p:cNvPr id="38" name="Shape 34"/>
           <p:cNvSpPr/>
           <p:nvPr/>
         </p:nvSpPr>
         <p:spPr>
           <a:xfrm>
-            <a:off x="7620000" y="457200"/>
+            <a:off x="7620000" y="400050"/>
             <a:ext cx="95250" cy="95250"/>
           </a:xfrm>
           <a:prstGeom prst="ellipse">
@@ -1993,13 +2175,13 @@
       </p:sp>
       <p:sp>
         <p:nvSpPr>
-          <p:cNvPr id="36" name="Text 32"/>
+          <p:cNvPr id="39" name="Text 35"/>
           <p:cNvSpPr txBox="1"/>
           <p:nvPr/>
         </p:nvSpPr>
         <p:spPr>
           <a:xfrm>
-            <a:off x="7867650" y="419100"/>
+            <a:off x="7867650" y="361950"/>
             <a:ext cx="3714750" cy="171450"/>
           </a:xfrm>
           <a:prstGeom prst="rect">
@@ -2032,7 +2214,7 @@
       </p:sp>
       <p:pic>
         <p:nvPicPr>
-          <p:cNvPr id="37" name="Swagger screenshot" descr="C:\Users\Aaron\AppData\Local\Temp\claude\C--Users-Aaron-Desktop-ict30017-P01-inventory-management-schools\97f81feb-cc42-48d2-a7dc-9fa67447c472\scratchpad\pptx\swagger_top_crop.png">    </p:cNvPr>
+          <p:cNvPr id="40" name="Swagger screenshot" descr="C:\Users\Aaron\AppData\Local\Temp\claude\C--Users-Aaron-Desktop-ict30017-P01-inventory-management-schools\97f81feb-cc42-48d2-a7dc-9fa67447c472\scratchpad\pptx\swagger_top_crop.png">    </p:cNvPr>
           <p:cNvPicPr>
             <a:picLocks noChangeAspect="1"/>
           </p:cNvPicPr>
@@ -2046,8 +2228,8 @@
         </p:blipFill>
         <p:spPr>
           <a:xfrm>
-            <a:off x="7229475" y="628650"/>
-            <a:ext cx="4457700" cy="4219575"/>
+            <a:off x="7229475" y="571500"/>
+            <a:ext cx="4457700" cy="4210050"/>
           </a:xfrm>
           <a:prstGeom prst="rect">
             <a:avLst/>
@@ -2056,13 +2238,13 @@
       </p:pic>
       <p:sp>
         <p:nvSpPr>
-          <p:cNvPr id="38" name="Text 33"/>
+          <p:cNvPr id="41" name="Text 36"/>
           <p:cNvSpPr txBox="1"/>
           <p:nvPr/>
         </p:nvSpPr>
         <p:spPr>
           <a:xfrm>
-            <a:off x="7219950" y="4953000"/>
+            <a:off x="7219950" y="4991100"/>
             <a:ext cx="4476750" cy="190500"/>
           </a:xfrm>
           <a:prstGeom prst="rect">
@@ -2095,13 +2277,13 @@
       </p:sp>
       <p:sp>
         <p:nvSpPr>
-          <p:cNvPr id="39" name="Shape 34"/>
+          <p:cNvPr id="42" name="Shape 37"/>
           <p:cNvSpPr/>
           <p:nvPr/>
         </p:nvSpPr>
         <p:spPr>
           <a:xfrm>
-            <a:off x="7325677" y="5257800"/>
+            <a:off x="7325677" y="5295900"/>
             <a:ext cx="1510665" cy="247650"/>
           </a:xfrm>
           <a:prstGeom prst="roundRect">
@@ -2122,13 +2304,13 @@
       </p:sp>
       <p:sp>
         <p:nvSpPr>
-          <p:cNvPr id="40" name="Text 35"/>
+          <p:cNvPr id="43" name="Text 38"/>
           <p:cNvSpPr txBox="1"/>
           <p:nvPr/>
         </p:nvSpPr>
         <p:spPr>
           <a:xfrm>
-            <a:off x="7325677" y="5257800"/>
+            <a:off x="7325677" y="5295900"/>
             <a:ext cx="1510665" cy="247650"/>
           </a:xfrm>
           <a:prstGeom prst="rect">
@@ -2161,13 +2343,13 @@
       </p:sp>
       <p:sp>
         <p:nvSpPr>
-          <p:cNvPr id="41" name="Shape 36"/>
+          <p:cNvPr id="44" name="Shape 39"/>
           <p:cNvSpPr/>
           <p:nvPr/>
         </p:nvSpPr>
         <p:spPr>
           <a:xfrm>
-            <a:off x="8893492" y="5257800"/>
+            <a:off x="8893492" y="5295900"/>
             <a:ext cx="1447800" cy="247650"/>
           </a:xfrm>
           <a:prstGeom prst="roundRect">
@@ -2188,13 +2370,13 @@
       </p:sp>
       <p:sp>
         <p:nvSpPr>
-          <p:cNvPr id="42" name="Text 37"/>
+          <p:cNvPr id="45" name="Text 40"/>
           <p:cNvSpPr txBox="1"/>
           <p:nvPr/>
         </p:nvSpPr>
         <p:spPr>
           <a:xfrm>
-            <a:off x="8893492" y="5257800"/>
+            <a:off x="8893492" y="5295900"/>
             <a:ext cx="1447800" cy="247650"/>
           </a:xfrm>
           <a:prstGeom prst="rect">
@@ -2227,13 +2409,13 @@
       </p:sp>
       <p:sp>
         <p:nvSpPr>
-          <p:cNvPr id="43" name="Shape 38"/>
+          <p:cNvPr id="46" name="Shape 41"/>
           <p:cNvSpPr/>
           <p:nvPr/>
         </p:nvSpPr>
         <p:spPr>
           <a:xfrm>
-            <a:off x="10398442" y="5257800"/>
+            <a:off x="10398442" y="5295900"/>
             <a:ext cx="567690" cy="247650"/>
           </a:xfrm>
           <a:prstGeom prst="roundRect">
@@ -2254,13 +2436,13 @@
       </p:sp>
       <p:sp>
         <p:nvSpPr>
-          <p:cNvPr id="44" name="Text 39"/>
+          <p:cNvPr id="47" name="Text 42"/>
           <p:cNvSpPr txBox="1"/>
           <p:nvPr/>
         </p:nvSpPr>
         <p:spPr>
           <a:xfrm>
-            <a:off x="10398442" y="5257800"/>
+            <a:off x="10398442" y="5295900"/>
             <a:ext cx="567690" cy="247650"/>
           </a:xfrm>
           <a:prstGeom prst="rect">
@@ -2293,13 +2475,13 @@
       </p:sp>
       <p:sp>
         <p:nvSpPr>
-          <p:cNvPr id="45" name="Shape 40"/>
+          <p:cNvPr id="48" name="Shape 43"/>
           <p:cNvSpPr/>
           <p:nvPr/>
         </p:nvSpPr>
         <p:spPr>
           <a:xfrm>
-            <a:off x="11023282" y="5257800"/>
+            <a:off x="11023282" y="5295900"/>
             <a:ext cx="567690" cy="247650"/>
           </a:xfrm>
           <a:prstGeom prst="roundRect">
@@ -2320,13 +2502,13 @@
       </p:sp>
       <p:sp>
         <p:nvSpPr>
-          <p:cNvPr id="46" name="Text 41"/>
+          <p:cNvPr id="49" name="Text 44"/>
           <p:cNvSpPr txBox="1"/>
           <p:nvPr/>
         </p:nvSpPr>
         <p:spPr>
           <a:xfrm>
-            <a:off x="11023282" y="5257800"/>
+            <a:off x="11023282" y="5295900"/>
             <a:ext cx="567690" cy="247650"/>
           </a:xfrm>
           <a:prstGeom prst="rect">
@@ -2359,13 +2541,13 @@
       </p:sp>
       <p:sp>
         <p:nvSpPr>
-          <p:cNvPr id="47" name="Shape 42"/>
+          <p:cNvPr id="50" name="Shape 45"/>
           <p:cNvSpPr/>
           <p:nvPr/>
         </p:nvSpPr>
         <p:spPr>
           <a:xfrm>
-            <a:off x="8891588" y="5572125"/>
+            <a:off x="8891588" y="5610225"/>
             <a:ext cx="1133475" cy="247650"/>
           </a:xfrm>
           <a:prstGeom prst="roundRect">
@@ -2386,13 +2568,13 @@
       </p:sp>
       <p:sp>
         <p:nvSpPr>
-          <p:cNvPr id="48" name="Text 43"/>
+          <p:cNvPr id="51" name="Text 46"/>
           <p:cNvSpPr txBox="1"/>
           <p:nvPr/>
         </p:nvSpPr>
         <p:spPr>
           <a:xfrm>
-            <a:off x="8891588" y="5572125"/>
+            <a:off x="8891588" y="5610225"/>
             <a:ext cx="1133475" cy="247650"/>
           </a:xfrm>
           <a:prstGeom prst="rect">
@@ -2425,13 +2607,13 @@
       </p:sp>
       <p:sp>
         <p:nvSpPr>
-          <p:cNvPr id="49" name="Text 44"/>
+          <p:cNvPr id="52" name="Text 47"/>
           <p:cNvSpPr txBox="1"/>
           <p:nvPr/>
         </p:nvSpPr>
         <p:spPr>
           <a:xfrm>
-            <a:off x="495300" y="6534150"/>
+            <a:off x="495300" y="6477000"/>
             <a:ext cx="4762500" cy="171450"/>
           </a:xfrm>
           <a:prstGeom prst="rect">
@@ -2464,13 +2646,13 @@
       </p:sp>
       <p:sp>
         <p:nvSpPr>
-          <p:cNvPr id="50" name="Text 45"/>
+          <p:cNvPr id="53" name="Text 48"/>
           <p:cNvSpPr txBox="1"/>
           <p:nvPr/>
         </p:nvSpPr>
         <p:spPr>
           <a:xfrm>
-            <a:off x="8572500" y="6534150"/>
+            <a:off x="8572500" y="6477000"/>
             <a:ext cx="3124200" cy="171450"/>
           </a:xfrm>
           <a:prstGeom prst="rect">
